--- a/docs/instructor/lab-1b-bugfix-test-driven.pptx
+++ b/docs/instructor/lab-1b-bugfix-test-driven.pptx
@@ -1715,7 +1715,7 @@
           <a:lstStyle/>
           <a:p>
             <a:r>
-              <a:t>Do this before anything hands-on (~2 min). The green 'Use this template → Create a new repository' button (circled in the screenshot) makes their OWN copy — not Fork, not plain Clone. Then the setup script (`./scripts/setup-repo.sh`, or `.ps1` on Windows) seeds the lab labels + backlog issues, since template copies don't inherit issues — they'll need `gh auth login` first. Then `npm install` / `npm run reset-db` / `npm run dev` (Node 20+). Confirm `npm test` is green, then pick a `lab-1` issue. If anyone's stuck here, pair them before the demo.</a:t>
+              <a:t>Do this before anything hands-on (~2 min). Repo: github.com/mike-tajmajer-fullstacklabs/fsl-taskboard-lab (shown top-left). The green 'Use this template → Create a new repository' button (circled in the screenshot) makes their OWN copy — not Fork, not plain Clone. Then the setup script (`./scripts/setup-repo.sh`, or `.ps1` on Windows) seeds the lab labels + backlog issues, since template copies don't inherit issues — they'll need `gh auth login` first. Then `npm install` / `npm run reset-db` / `npm run dev` (Node 20+). Confirm `npm test` is green, then pick a `lab-1` issue. If anyone's stuck here, pair them before the demo.</a:t>
             </a:r>
           </a:p>
         </p:txBody>
@@ -17047,14 +17047,99 @@
       </p:sp>
       <p:sp>
         <p:nvSpPr>
-          <p:cNvPr id="7" name="TextBox 6"/>
+          <p:cNvPr id="7" name="Rounded Rectangle 6"/>
+          <p:cNvSpPr/>
+          <p:nvPr/>
+        </p:nvSpPr>
+        <p:spPr>
+          <a:xfrm>
+            <a:off x="548640" y="1371600"/>
+            <a:ext cx="3246120" cy="384048"/>
+          </a:xfrm>
+          <a:prstGeom prst="roundRect">
+            <a:avLst>
+              <a:gd name="adj" fmla="val 6000"/>
+            </a:avLst>
+          </a:prstGeom>
+          <a:solidFill>
+            <a:srgbClr val="E2ECFF"/>
+          </a:solidFill>
+          <a:ln>
+            <a:noFill/>
+          </a:ln>
+          <a:effectLst/>
+        </p:spPr>
+        <p:style>
+          <a:lnRef idx="1">
+            <a:schemeClr val="accent1"/>
+          </a:lnRef>
+          <a:fillRef idx="3">
+            <a:schemeClr val="accent1"/>
+          </a:fillRef>
+          <a:effectRef idx="2">
+            <a:schemeClr val="accent1"/>
+          </a:effectRef>
+          <a:fontRef idx="minor">
+            <a:schemeClr val="lt1"/>
+          </a:fontRef>
+        </p:style>
+        <p:txBody>
+          <a:bodyPr rtlCol="0" anchor="ctr"/>
+          <a:lstStyle/>
+          <a:p>
+            <a:pPr algn="ctr"/>
+          </a:p>
+        </p:txBody>
+      </p:sp>
+      <p:sp>
+        <p:nvSpPr>
+          <p:cNvPr id="8" name="TextBox 7"/>
           <p:cNvSpPr txBox="1"/>
           <p:nvPr/>
         </p:nvSpPr>
         <p:spPr>
           <a:xfrm>
-            <a:off x="548640" y="1417320"/>
-            <a:ext cx="3246120" cy="3200400"/>
+            <a:off x="713232" y="1371600"/>
+            <a:ext cx="2971800" cy="384048"/>
+          </a:xfrm>
+          <a:prstGeom prst="rect">
+            <a:avLst/>
+          </a:prstGeom>
+          <a:noFill/>
+        </p:spPr>
+        <p:txBody>
+          <a:bodyPr wrap="square" anchor="ctr" lIns="0" rIns="0" tIns="0" bIns="0">
+            <a:spAutoFit/>
+          </a:bodyPr>
+          <a:lstStyle/>
+          <a:p>
+            <a:pPr algn="l">
+              <a:lnSpc>
+                <a:spcPct val="100000"/>
+              </a:lnSpc>
+            </a:pPr>
+            <a:r>
+              <a:rPr sz="950" b="1" i="0">
+                <a:solidFill>
+                  <a:srgbClr val="13135E"/>
+                </a:solidFill>
+                <a:latin typeface="Consolas"/>
+              </a:rPr>
+              <a:t>github.com/mike-tajmajer-fullstacklabs/fsl-taskboard-lab</a:t>
+            </a:r>
+          </a:p>
+        </p:txBody>
+      </p:sp>
+      <p:sp>
+        <p:nvSpPr>
+          <p:cNvPr id="9" name="TextBox 8"/>
+          <p:cNvSpPr txBox="1"/>
+          <p:nvPr/>
+        </p:nvSpPr>
+        <p:spPr>
+          <a:xfrm>
+            <a:off x="548640" y="1874519"/>
+            <a:ext cx="3246120" cy="2743200"/>
           </a:xfrm>
           <a:prstGeom prst="rect">
             <a:avLst/>
@@ -17072,7 +17157,7 @@
                 <a:spcPct val="105000"/>
               </a:lnSpc>
               <a:spcAft>
-                <a:spcPts val="1300"/>
+                <a:spcPts val="1200"/>
               </a:spcAft>
             </a:pPr>
             <a:r>
@@ -17091,7 +17176,7 @@
                 </a:solidFill>
                 <a:latin typeface="Arial"/>
               </a:rPr>
-              <a:t>Click Use this template → Create a new repository (green button, top-right — circled). Your own copy, not a fork.</a:t>
+              <a:t>On that repo, click Use this template → Create a new repository (green button, top-right — circled). Your own copy, not a fork.</a:t>
             </a:r>
           </a:p>
           <a:p>
@@ -17100,7 +17185,7 @@
                 <a:spcPct val="105000"/>
               </a:lnSpc>
               <a:spcAft>
-                <a:spcPts val="1300"/>
+                <a:spcPts val="1200"/>
               </a:spcAft>
             </a:pPr>
             <a:r>
@@ -17128,7 +17213,7 @@
                 <a:spcPct val="105000"/>
               </a:lnSpc>
               <a:spcAft>
-                <a:spcPts val="1300"/>
+                <a:spcPts val="1200"/>
               </a:spcAft>
             </a:pPr>
             <a:r>
@@ -17156,7 +17241,7 @@
                 <a:spcPct val="105000"/>
               </a:lnSpc>
               <a:spcAft>
-                <a:spcPts val="1300"/>
+                <a:spcPts val="1200"/>
               </a:spcAft>
             </a:pPr>
             <a:r>
@@ -17182,7 +17267,7 @@
       </p:sp>
       <p:sp>
         <p:nvSpPr>
-          <p:cNvPr id="8" name="Rectangle 7"/>
+          <p:cNvPr id="10" name="Rectangle 9"/>
           <p:cNvSpPr/>
           <p:nvPr/>
         </p:nvSpPr>
@@ -17226,7 +17311,7 @@
       </p:sp>
       <p:pic>
         <p:nvPicPr>
-          <p:cNvPr id="9" name="Picture 8" descr="use-this-template.png"/>
+          <p:cNvPr id="11" name="Picture 10" descr="use-this-template.png"/>
           <p:cNvPicPr>
             <a:picLocks noChangeAspect="1"/>
           </p:cNvPicPr>
@@ -17250,7 +17335,7 @@
       </p:pic>
       <p:sp>
         <p:nvSpPr>
-          <p:cNvPr id="10" name="TextBox 9"/>
+          <p:cNvPr id="12" name="TextBox 11"/>
           <p:cNvSpPr txBox="1"/>
           <p:nvPr/>
         </p:nvSpPr>
@@ -17289,7 +17374,7 @@
       </p:sp>
       <p:sp>
         <p:nvSpPr>
-          <p:cNvPr id="11" name="TextBox 10"/>
+          <p:cNvPr id="13" name="TextBox 12"/>
           <p:cNvSpPr txBox="1"/>
           <p:nvPr/>
         </p:nvSpPr>

--- a/docs/instructor/lab-1b-bugfix-test-driven.pptx
+++ b/docs/instructor/lab-1b-bugfix-test-driven.pptx
@@ -7,6 +7,7 @@
   <p:sldIdLst>
     <p:sldId id="256" r:id="rId7"/>
     <p:sldId id="257" r:id="rId8"/>
+    <p:sldId id="280" r:id="rId32"/>
     <p:sldId id="258" r:id="rId9"/>
     <p:sldId id="259" r:id="rId10"/>
     <p:sldId id="260" r:id="rId11"/>
@@ -1670,6 +1671,76 @@
 </p:notes>
 </file>
 
+<file path=ppt/notesSlides/notesSlide25.xml><?xml version="1.0" encoding="utf-8"?>
+<p:notes xmlns:a="http://schemas.openxmlformats.org/drawingml/2006/main" xmlns:p="http://schemas.openxmlformats.org/presentationml/2006/main" xmlns:r="http://schemas.openxmlformats.org/officeDocument/2006/relationships">
+  <p:cSld>
+    <p:spTree>
+      <p:nvGrpSpPr>
+        <p:cNvPr id="1" name=""/>
+        <p:cNvGrpSpPr/>
+        <p:nvPr/>
+      </p:nvGrpSpPr>
+      <p:grpSpPr>
+        <a:xfrm>
+          <a:off x="0" y="0"/>
+          <a:ext cx="0" cy="0"/>
+          <a:chOff x="0" y="0"/>
+          <a:chExt cx="0" cy="0"/>
+        </a:xfrm>
+      </p:grpSpPr>
+      <p:sp>
+        <p:nvSpPr>
+          <p:cNvPr id="2" name="Slide Image Placeholder 1"/>
+          <p:cNvSpPr>
+            <a:spLocks noGrp="1"/>
+          </p:cNvSpPr>
+          <p:nvPr>
+            <p:ph type="sldImg" idx="2"/>
+          </p:nvPr>
+        </p:nvSpPr>
+        <p:spPr/>
+      </p:sp>
+      <p:sp>
+        <p:nvSpPr>
+          <p:cNvPr id="3" name="Notes Placeholder 2"/>
+          <p:cNvSpPr>
+            <a:spLocks noGrp="1"/>
+          </p:cNvSpPr>
+          <p:nvPr>
+            <p:ph type="body" idx="3" sz="quarter"/>
+          </p:nvPr>
+        </p:nvSpPr>
+        <p:spPr/>
+        <p:txBody>
+          <a:bodyPr/>
+          <a:lstStyle/>
+          <a:p>
+            <a:r>
+              <a:t>One-time install, ideally before lab day (~10 min). macOS column assumes Homebrew, Windows assumes winget (built into Win 10/11) — fallback for both is each tool’s download page. Why each tool: git drives the branch/PR flow; nvm makes `nvm use` match the repo’s .nvmrc; Node floor is LTS 20.19+ because Vite 7 requires it — 20, 22, or 24 LTS all work, odd majors (23) print engine warnings that confuse people; GitHub CLI powers the issue-seeding script and PR flow (`gh auth login` is the step people forget); Claude Code uses the native installer — self-updating and avoids npm -g permission problems on locked-down machines; any editor is fine, the demo narrates from VS Code. Accounts: a GitHub account plus an EDS-provisioned Claude Code seat — have everyone run the VERIFY line and complete a Claude login BEFORE lab day; pair anyone broken at the door rather than during the demo.</a:t>
+            </a:r>
+          </a:p>
+        </p:txBody>
+      </p:sp>
+      <p:sp>
+        <p:nvSpPr>
+          <p:cNvPr id="4" name="Slide Number Placeholder 3"/>
+          <p:cNvSpPr>
+            <a:spLocks noGrp="1"/>
+          </p:cNvSpPr>
+          <p:nvPr>
+            <p:ph type="sldNum" idx="5" sz="quarter"/>
+          </p:nvPr>
+        </p:nvSpPr>
+        <p:spPr/>
+      </p:sp>
+    </p:spTree>
+  </p:cSld>
+  <p:clrMapOvr>
+    <a:masterClrMapping/>
+  </p:clrMapOvr>
+</p:notes>
+</file>
+
 <file path=ppt/notesSlides/notesSlide3.xml><?xml version="1.0" encoding="utf-8"?>
 <p:notes xmlns:a="http://schemas.openxmlformats.org/drawingml/2006/main" xmlns:p="http://schemas.openxmlformats.org/presentationml/2006/main" xmlns:r="http://schemas.openxmlformats.org/officeDocument/2006/relationships">
   <p:cSld>
@@ -1715,7 +1786,7 @@
           <a:lstStyle/>
           <a:p>
             <a:r>
-              <a:t>Do this before anything hands-on (~2 min). Repo: github.com/mike-tajmajer-fullstacklabs/fsl-taskboard-lab (shown top-left). The green 'Use this template → Create a new repository' button (circled in the screenshot) makes their OWN copy — not Fork, not plain Clone. Then the setup script (`./scripts/setup-repo.sh`, or `.ps1` on Windows) seeds the lab labels + backlog issues, since template copies don't inherit issues — they'll need `gh auth login` first. Then `npm install` / `npm run reset-db` / `npm run dev` (Node 20+). Confirm `npm test` is green, then pick a `lab-1` issue. If anyone's stuck here, pair them before the demo.</a:t>
+              <a:t>Do this before anything hands-on (~2 min). Repo: github.com/mike-tajmajer-fullstacklabs/fsl-taskboard-lab (shown top-left). The green 'Use this template → Create a new repository' button (circled in the screenshot) makes their OWN copy — not Fork, not plain Clone. Then the setup script (`./scripts/setup-repo.sh`, or `.ps1` on Windows) seeds the lab labels + backlog issues, since template copies don't inherit issues — gh auth was handled on the tooling slide. Then `npm install` / `npm run reset-db` / `npm run dev` (Node LTS ≥ 20.19; `nvm use` reads .nvmrc). Confirm `npm test` is green, then pick a `lab-1` issue. If anyone's stuck here, pair them before the demo. Tooling itself was installed on the previous slide — this slide is only about the repo.</a:t>
             </a:r>
           </a:p>
         </p:txBody>
@@ -16845,6 +16916,1478 @@
 </p:sld>
 </file>
 
+<file path=ppt/slides/slide25.xml><?xml version="1.0" encoding="utf-8"?>
+<p:sld xmlns:a="http://schemas.openxmlformats.org/drawingml/2006/main" xmlns:p="http://schemas.openxmlformats.org/presentationml/2006/main" xmlns:r="http://schemas.openxmlformats.org/officeDocument/2006/relationships">
+  <p:cSld>
+    <p:spTree>
+      <p:nvGrpSpPr>
+        <p:cNvPr id="1" name=""/>
+        <p:cNvGrpSpPr/>
+        <p:nvPr/>
+      </p:nvGrpSpPr>
+      <p:grpSpPr/>
+      <p:sp>
+        <p:nvSpPr>
+          <p:cNvPr id="2" name="Rectangle 1"/>
+          <p:cNvSpPr/>
+          <p:nvPr/>
+        </p:nvSpPr>
+        <p:spPr>
+          <a:xfrm>
+            <a:off x="0" y="0"/>
+            <a:ext cx="9144000" cy="5143500"/>
+          </a:xfrm>
+          <a:prstGeom prst="rect">
+            <a:avLst/>
+          </a:prstGeom>
+          <a:solidFill>
+            <a:srgbClr val="FFFFFF"/>
+          </a:solidFill>
+          <a:ln>
+            <a:noFill/>
+          </a:ln>
+          <a:effectLst/>
+        </p:spPr>
+        <p:style>
+          <a:lnRef idx="1">
+            <a:schemeClr val="accent1"/>
+          </a:lnRef>
+          <a:fillRef idx="3">
+            <a:schemeClr val="accent1"/>
+          </a:fillRef>
+          <a:effectRef idx="2">
+            <a:schemeClr val="accent1"/>
+          </a:effectRef>
+          <a:fontRef idx="minor">
+            <a:schemeClr val="lt1"/>
+          </a:fontRef>
+        </p:style>
+        <p:txBody>
+          <a:bodyPr rtlCol="0" anchor="ctr"/>
+          <a:lstStyle/>
+          <a:p>
+            <a:pPr algn="ctr"/>
+          </a:p>
+        </p:txBody>
+      </p:sp>
+      <p:pic>
+        <p:nvPicPr>
+          <p:cNvPr id="3" name="Picture 2" descr="image.png"/>
+          <p:cNvPicPr>
+            <a:picLocks noChangeAspect="1"/>
+          </p:cNvPicPr>
+          <p:nvPr/>
+        </p:nvPicPr>
+        <p:blipFill>
+          <a:blip r:embed="rId2"/>
+          <a:stretch>
+            <a:fillRect/>
+          </a:stretch>
+        </p:blipFill>
+        <p:spPr>
+          <a:xfrm>
+            <a:off x="8229600" y="411480"/>
+            <a:ext cx="713741" cy="384048"/>
+          </a:xfrm>
+          <a:prstGeom prst="rect">
+            <a:avLst/>
+          </a:prstGeom>
+        </p:spPr>
+      </p:pic>
+      <p:sp>
+        <p:nvSpPr>
+          <p:cNvPr id="4" name="Rectangle 3"/>
+          <p:cNvSpPr/>
+          <p:nvPr/>
+        </p:nvSpPr>
+        <p:spPr>
+          <a:xfrm>
+            <a:off x="548640" y="457200"/>
+            <a:ext cx="237744" cy="50292"/>
+          </a:xfrm>
+          <a:prstGeom prst="rect">
+            <a:avLst/>
+          </a:prstGeom>
+          <a:solidFill>
+            <a:srgbClr val="403FE8"/>
+          </a:solidFill>
+          <a:ln>
+            <a:noFill/>
+          </a:ln>
+          <a:effectLst/>
+        </p:spPr>
+        <p:style>
+          <a:lnRef idx="1">
+            <a:schemeClr val="accent1"/>
+          </a:lnRef>
+          <a:fillRef idx="3">
+            <a:schemeClr val="accent1"/>
+          </a:fillRef>
+          <a:effectRef idx="2">
+            <a:schemeClr val="accent1"/>
+          </a:effectRef>
+          <a:fontRef idx="minor">
+            <a:schemeClr val="lt1"/>
+          </a:fontRef>
+        </p:style>
+        <p:txBody>
+          <a:bodyPr rtlCol="0" anchor="ctr"/>
+          <a:lstStyle/>
+          <a:p>
+            <a:pPr algn="ctr"/>
+          </a:p>
+        </p:txBody>
+      </p:sp>
+      <p:sp>
+        <p:nvSpPr>
+          <p:cNvPr id="5" name="TextBox 4"/>
+          <p:cNvSpPr txBox="1"/>
+          <p:nvPr/>
+        </p:nvSpPr>
+        <p:spPr>
+          <a:xfrm>
+            <a:off x="868680" y="402336"/>
+            <a:ext cx="7132320" cy="274320"/>
+          </a:xfrm>
+          <a:prstGeom prst="rect">
+            <a:avLst/>
+          </a:prstGeom>
+          <a:noFill/>
+        </p:spPr>
+        <p:txBody>
+          <a:bodyPr wrap="square">
+            <a:spAutoFit/>
+          </a:bodyPr>
+          <a:lstStyle/>
+          <a:p>
+            <a:r>
+              <a:rPr sz="1150" b="1">
+                <a:solidFill>
+                  <a:srgbClr val="403FE8"/>
+                </a:solidFill>
+                <a:latin typeface="Arial"/>
+              </a:rPr>
+              <a:t>SETUP</a:t>
+            </a:r>
+          </a:p>
+        </p:txBody>
+      </p:sp>
+      <p:sp>
+        <p:nvSpPr>
+          <p:cNvPr id="6" name="TextBox 5"/>
+          <p:cNvSpPr txBox="1"/>
+          <p:nvPr/>
+        </p:nvSpPr>
+        <p:spPr>
+          <a:xfrm>
+            <a:off x="548640" y="676656"/>
+            <a:ext cx="7589520" cy="640080"/>
+          </a:xfrm>
+          <a:prstGeom prst="rect">
+            <a:avLst/>
+          </a:prstGeom>
+          <a:noFill/>
+        </p:spPr>
+        <p:txBody>
+          <a:bodyPr wrap="square">
+            <a:spAutoFit/>
+          </a:bodyPr>
+          <a:lstStyle/>
+          <a:p>
+            <a:r>
+              <a:rPr sz="2500" b="1">
+                <a:solidFill>
+                  <a:srgbClr val="13135E"/>
+                </a:solidFill>
+                <a:latin typeface="Arial"/>
+              </a:rPr>
+              <a:t>Install your tooling</a:t>
+            </a:r>
+          </a:p>
+        </p:txBody>
+      </p:sp>
+      <p:sp>
+        <p:nvSpPr>
+          <p:cNvPr id="7" name="TextBox 6"/>
+          <p:cNvSpPr txBox="1"/>
+          <p:nvPr/>
+        </p:nvSpPr>
+        <p:spPr>
+          <a:xfrm>
+            <a:off x="548640" y="1234440"/>
+            <a:ext cx="8046720" cy="274320"/>
+          </a:xfrm>
+          <a:prstGeom prst="rect">
+            <a:avLst/>
+          </a:prstGeom>
+          <a:noFill/>
+        </p:spPr>
+        <p:txBody>
+          <a:bodyPr wrap="square">
+            <a:spAutoFit/>
+          </a:bodyPr>
+          <a:lstStyle/>
+          <a:p>
+            <a:r>
+              <a:rPr sz="1100" b="0">
+                <a:solidFill>
+                  <a:srgbClr val="434343"/>
+                </a:solidFill>
+                <a:latin typeface="Arial"/>
+              </a:rPr>
+              <a:t>One-time, before lab day — macOS via Homebrew, Windows via winget.</a:t>
+            </a:r>
+          </a:p>
+        </p:txBody>
+      </p:sp>
+      <p:sp>
+        <p:nvSpPr>
+          <p:cNvPr id="8" name="TextBox 7"/>
+          <p:cNvSpPr txBox="1"/>
+          <p:nvPr/>
+        </p:nvSpPr>
+        <p:spPr>
+          <a:xfrm>
+            <a:off x="548640" y="4846320"/>
+            <a:ext cx="7315200" cy="219456"/>
+          </a:xfrm>
+          <a:prstGeom prst="rect">
+            <a:avLst/>
+          </a:prstGeom>
+          <a:noFill/>
+        </p:spPr>
+        <p:txBody>
+          <a:bodyPr wrap="square">
+            <a:spAutoFit/>
+          </a:bodyPr>
+          <a:lstStyle/>
+          <a:p>
+            <a:r>
+              <a:rPr sz="850" b="0">
+                <a:solidFill>
+                  <a:srgbClr val="999999"/>
+                </a:solidFill>
+                <a:latin typeface="Arial"/>
+              </a:rPr>
+              <a:t>FSL AI Training · Lab 1.b — Fixing Bugs, Test-First</a:t>
+            </a:r>
+          </a:p>
+        </p:txBody>
+      </p:sp>
+      <p:sp>
+        <p:nvSpPr>
+          <p:cNvPr id="9" name="Rounded Rectangle 8"/>
+          <p:cNvSpPr/>
+          <p:nvPr/>
+        </p:nvSpPr>
+        <p:spPr>
+          <a:xfrm>
+            <a:off x="548640" y="1554480"/>
+            <a:ext cx="8046720" cy="320040"/>
+          </a:xfrm>
+          <a:prstGeom prst="roundRect">
+            <a:avLst/>
+          </a:prstGeom>
+          <a:solidFill>
+            <a:srgbClr val="13135E"/>
+          </a:solidFill>
+          <a:ln>
+            <a:noFill/>
+          </a:ln>
+          <a:effectLst/>
+        </p:spPr>
+        <p:style>
+          <a:lnRef idx="1">
+            <a:schemeClr val="accent1"/>
+          </a:lnRef>
+          <a:fillRef idx="3">
+            <a:schemeClr val="accent1"/>
+          </a:fillRef>
+          <a:effectRef idx="2">
+            <a:schemeClr val="accent1"/>
+          </a:effectRef>
+          <a:fontRef idx="minor">
+            <a:schemeClr val="lt1"/>
+          </a:fontRef>
+        </p:style>
+        <p:txBody>
+          <a:bodyPr rtlCol="0" anchor="ctr"/>
+          <a:lstStyle/>
+          <a:p>
+            <a:pPr algn="ctr"/>
+          </a:p>
+        </p:txBody>
+      </p:sp>
+      <p:sp>
+        <p:nvSpPr>
+          <p:cNvPr id="10" name="TextBox 9"/>
+          <p:cNvSpPr txBox="1"/>
+          <p:nvPr/>
+        </p:nvSpPr>
+        <p:spPr>
+          <a:xfrm>
+            <a:off x="731520" y="1577340"/>
+            <a:ext cx="1554480" cy="274320"/>
+          </a:xfrm>
+          <a:prstGeom prst="rect">
+            <a:avLst/>
+          </a:prstGeom>
+          <a:noFill/>
+        </p:spPr>
+        <p:txBody>
+          <a:bodyPr wrap="square">
+            <a:spAutoFit/>
+          </a:bodyPr>
+          <a:lstStyle/>
+          <a:p>
+            <a:r>
+              <a:rPr sz="950" b="1">
+                <a:solidFill>
+                  <a:srgbClr val="FFFFFF"/>
+                </a:solidFill>
+                <a:latin typeface="Arial"/>
+              </a:rPr>
+              <a:t>Tool</a:t>
+            </a:r>
+          </a:p>
+        </p:txBody>
+      </p:sp>
+      <p:sp>
+        <p:nvSpPr>
+          <p:cNvPr id="11" name="TextBox 10"/>
+          <p:cNvSpPr txBox="1"/>
+          <p:nvPr/>
+        </p:nvSpPr>
+        <p:spPr>
+          <a:xfrm>
+            <a:off x="2377440" y="1577340"/>
+            <a:ext cx="3016000" cy="274320"/>
+          </a:xfrm>
+          <a:prstGeom prst="rect">
+            <a:avLst/>
+          </a:prstGeom>
+          <a:noFill/>
+        </p:spPr>
+        <p:txBody>
+          <a:bodyPr wrap="square">
+            <a:spAutoFit/>
+          </a:bodyPr>
+          <a:lstStyle/>
+          <a:p>
+            <a:r>
+              <a:rPr sz="950" b="1">
+                <a:solidFill>
+                  <a:srgbClr val="FFFFFF"/>
+                </a:solidFill>
+                <a:latin typeface="Arial"/>
+              </a:rPr>
+              <a:t>macOS</a:t>
+            </a:r>
+          </a:p>
+        </p:txBody>
+      </p:sp>
+      <p:sp>
+        <p:nvSpPr>
+          <p:cNvPr id="12" name="TextBox 11"/>
+          <p:cNvSpPr txBox="1"/>
+          <p:nvPr/>
+        </p:nvSpPr>
+        <p:spPr>
+          <a:xfrm>
+            <a:off x="5486400" y="1577340"/>
+            <a:ext cx="3016000" cy="274320"/>
+          </a:xfrm>
+          <a:prstGeom prst="rect">
+            <a:avLst/>
+          </a:prstGeom>
+          <a:noFill/>
+        </p:spPr>
+        <p:txBody>
+          <a:bodyPr wrap="square">
+            <a:spAutoFit/>
+          </a:bodyPr>
+          <a:lstStyle/>
+          <a:p>
+            <a:r>
+              <a:rPr sz="950" b="1">
+                <a:solidFill>
+                  <a:srgbClr val="FFFFFF"/>
+                </a:solidFill>
+                <a:latin typeface="Arial"/>
+              </a:rPr>
+              <a:t>Windows</a:t>
+            </a:r>
+          </a:p>
+        </p:txBody>
+      </p:sp>
+      <p:sp>
+        <p:nvSpPr>
+          <p:cNvPr id="13" name="Rounded Rectangle 12"/>
+          <p:cNvSpPr/>
+          <p:nvPr/>
+        </p:nvSpPr>
+        <p:spPr>
+          <a:xfrm>
+            <a:off x="548640" y="1920240"/>
+            <a:ext cx="8046720" cy="393192"/>
+          </a:xfrm>
+          <a:prstGeom prst="roundRect">
+            <a:avLst/>
+          </a:prstGeom>
+          <a:solidFill>
+            <a:srgbClr val="E2ECFF"/>
+          </a:solidFill>
+          <a:ln>
+            <a:noFill/>
+          </a:ln>
+          <a:effectLst/>
+        </p:spPr>
+        <p:style>
+          <a:lnRef idx="1">
+            <a:schemeClr val="accent1"/>
+          </a:lnRef>
+          <a:fillRef idx="3">
+            <a:schemeClr val="accent1"/>
+          </a:fillRef>
+          <a:effectRef idx="2">
+            <a:schemeClr val="accent1"/>
+          </a:effectRef>
+          <a:fontRef idx="minor">
+            <a:schemeClr val="lt1"/>
+          </a:fontRef>
+        </p:style>
+        <p:txBody>
+          <a:bodyPr rtlCol="0" anchor="ctr"/>
+          <a:lstStyle/>
+          <a:p>
+            <a:pPr algn="ctr"/>
+          </a:p>
+        </p:txBody>
+      </p:sp>
+      <p:sp>
+        <p:nvSpPr>
+          <p:cNvPr id="14" name="TextBox 13"/>
+          <p:cNvSpPr txBox="1"/>
+          <p:nvPr/>
+        </p:nvSpPr>
+        <p:spPr>
+          <a:xfrm>
+            <a:off x="731520" y="1981200"/>
+            <a:ext cx="1554480" cy="274320"/>
+          </a:xfrm>
+          <a:prstGeom prst="rect">
+            <a:avLst/>
+          </a:prstGeom>
+          <a:noFill/>
+        </p:spPr>
+        <p:txBody>
+          <a:bodyPr wrap="square">
+            <a:spAutoFit/>
+          </a:bodyPr>
+          <a:lstStyle/>
+          <a:p>
+            <a:r>
+              <a:rPr sz="900" b="1">
+                <a:solidFill>
+                  <a:srgbClr val="13135E"/>
+                </a:solidFill>
+                <a:latin typeface="Arial"/>
+              </a:rPr>
+              <a:t>Git</a:t>
+            </a:r>
+          </a:p>
+        </p:txBody>
+      </p:sp>
+      <p:sp>
+        <p:nvSpPr>
+          <p:cNvPr id="15" name="TextBox 14"/>
+          <p:cNvSpPr txBox="1"/>
+          <p:nvPr/>
+        </p:nvSpPr>
+        <p:spPr>
+          <a:xfrm>
+            <a:off x="2377440" y="1981200"/>
+            <a:ext cx="3016000" cy="274320"/>
+          </a:xfrm>
+          <a:prstGeom prst="rect">
+            <a:avLst/>
+          </a:prstGeom>
+          <a:noFill/>
+        </p:spPr>
+        <p:txBody>
+          <a:bodyPr wrap="square">
+            <a:spAutoFit/>
+          </a:bodyPr>
+          <a:lstStyle/>
+          <a:p>
+            <a:r>
+              <a:rPr sz="900" b="0">
+                <a:solidFill>
+                  <a:srgbClr val="434343"/>
+                </a:solidFill>
+                <a:latin typeface="Consolas"/>
+              </a:rPr>
+              <a:t>xcode-select --install</a:t>
+            </a:r>
+            <a:r>
+              <a:rPr sz="900" b="0">
+                <a:solidFill>
+                  <a:srgbClr val="999999"/>
+                </a:solidFill>
+                <a:latin typeface="Arial"/>
+              </a:rPr>
+              <a:t>  · or brew install git</a:t>
+            </a:r>
+          </a:p>
+        </p:txBody>
+      </p:sp>
+      <p:sp>
+        <p:nvSpPr>
+          <p:cNvPr id="16" name="TextBox 15"/>
+          <p:cNvSpPr txBox="1"/>
+          <p:nvPr/>
+        </p:nvSpPr>
+        <p:spPr>
+          <a:xfrm>
+            <a:off x="5486400" y="1981200"/>
+            <a:ext cx="3016000" cy="274320"/>
+          </a:xfrm>
+          <a:prstGeom prst="rect">
+            <a:avLst/>
+          </a:prstGeom>
+          <a:noFill/>
+        </p:spPr>
+        <p:txBody>
+          <a:bodyPr wrap="square">
+            <a:spAutoFit/>
+          </a:bodyPr>
+          <a:lstStyle/>
+          <a:p>
+            <a:r>
+              <a:rPr sz="900" b="0">
+                <a:solidFill>
+                  <a:srgbClr val="434343"/>
+                </a:solidFill>
+                <a:latin typeface="Consolas"/>
+              </a:rPr>
+              <a:t>winget install Git.Git</a:t>
+            </a:r>
+          </a:p>
+        </p:txBody>
+      </p:sp>
+      <p:sp>
+        <p:nvSpPr>
+          <p:cNvPr id="17" name="Rounded Rectangle 16"/>
+          <p:cNvSpPr/>
+          <p:nvPr/>
+        </p:nvSpPr>
+        <p:spPr>
+          <a:xfrm>
+            <a:off x="548640" y="2331720"/>
+            <a:ext cx="8046720" cy="393192"/>
+          </a:xfrm>
+          <a:prstGeom prst="roundRect">
+            <a:avLst/>
+          </a:prstGeom>
+          <a:solidFill>
+            <a:srgbClr val="FFFFFF"/>
+          </a:solidFill>
+          <a:ln w="15875">
+            <a:solidFill>
+              <a:srgbClr val="CCD9FF"/>
+            </a:solidFill>
+          </a:ln>
+          <a:effectLst/>
+        </p:spPr>
+        <p:style>
+          <a:lnRef idx="1">
+            <a:schemeClr val="accent1"/>
+          </a:lnRef>
+          <a:fillRef idx="3">
+            <a:schemeClr val="accent1"/>
+          </a:fillRef>
+          <a:effectRef idx="2">
+            <a:schemeClr val="accent1"/>
+          </a:effectRef>
+          <a:fontRef idx="minor">
+            <a:schemeClr val="lt1"/>
+          </a:fontRef>
+        </p:style>
+        <p:txBody>
+          <a:bodyPr rtlCol="0" anchor="ctr"/>
+          <a:lstStyle/>
+          <a:p>
+            <a:pPr algn="ctr"/>
+          </a:p>
+        </p:txBody>
+      </p:sp>
+      <p:sp>
+        <p:nvSpPr>
+          <p:cNvPr id="18" name="TextBox 17"/>
+          <p:cNvSpPr txBox="1"/>
+          <p:nvPr/>
+        </p:nvSpPr>
+        <p:spPr>
+          <a:xfrm>
+            <a:off x="731520" y="2392680"/>
+            <a:ext cx="1554480" cy="274320"/>
+          </a:xfrm>
+          <a:prstGeom prst="rect">
+            <a:avLst/>
+          </a:prstGeom>
+          <a:noFill/>
+        </p:spPr>
+        <p:txBody>
+          <a:bodyPr wrap="square">
+            <a:spAutoFit/>
+          </a:bodyPr>
+          <a:lstStyle/>
+          <a:p>
+            <a:r>
+              <a:rPr sz="900" b="1">
+                <a:solidFill>
+                  <a:srgbClr val="13135E"/>
+                </a:solidFill>
+                <a:latin typeface="Arial"/>
+              </a:rPr>
+              <a:t>nvm (Node manager)</a:t>
+            </a:r>
+          </a:p>
+        </p:txBody>
+      </p:sp>
+      <p:sp>
+        <p:nvSpPr>
+          <p:cNvPr id="19" name="TextBox 18"/>
+          <p:cNvSpPr txBox="1"/>
+          <p:nvPr/>
+        </p:nvSpPr>
+        <p:spPr>
+          <a:xfrm>
+            <a:off x="2377440" y="2392680"/>
+            <a:ext cx="3016000" cy="274320"/>
+          </a:xfrm>
+          <a:prstGeom prst="rect">
+            <a:avLst/>
+          </a:prstGeom>
+          <a:noFill/>
+        </p:spPr>
+        <p:txBody>
+          <a:bodyPr wrap="square">
+            <a:spAutoFit/>
+          </a:bodyPr>
+          <a:lstStyle/>
+          <a:p>
+            <a:r>
+              <a:rPr sz="900" b="0">
+                <a:solidFill>
+                  <a:srgbClr val="434343"/>
+                </a:solidFill>
+                <a:latin typeface="Consolas"/>
+              </a:rPr>
+              <a:t>brew install nvm</a:t>
+            </a:r>
+          </a:p>
+        </p:txBody>
+      </p:sp>
+      <p:sp>
+        <p:nvSpPr>
+          <p:cNvPr id="20" name="TextBox 19"/>
+          <p:cNvSpPr txBox="1"/>
+          <p:nvPr/>
+        </p:nvSpPr>
+        <p:spPr>
+          <a:xfrm>
+            <a:off x="5486400" y="2392680"/>
+            <a:ext cx="3016000" cy="274320"/>
+          </a:xfrm>
+          <a:prstGeom prst="rect">
+            <a:avLst/>
+          </a:prstGeom>
+          <a:noFill/>
+        </p:spPr>
+        <p:txBody>
+          <a:bodyPr wrap="square">
+            <a:spAutoFit/>
+          </a:bodyPr>
+          <a:lstStyle/>
+          <a:p>
+            <a:r>
+              <a:rPr sz="900" b="0">
+                <a:solidFill>
+                  <a:srgbClr val="434343"/>
+                </a:solidFill>
+                <a:latin typeface="Consolas"/>
+              </a:rPr>
+              <a:t>winget install CoreyButler.NVMforWindows</a:t>
+            </a:r>
+          </a:p>
+        </p:txBody>
+      </p:sp>
+      <p:sp>
+        <p:nvSpPr>
+          <p:cNvPr id="21" name="Rounded Rectangle 20"/>
+          <p:cNvSpPr/>
+          <p:nvPr/>
+        </p:nvSpPr>
+        <p:spPr>
+          <a:xfrm>
+            <a:off x="548640" y="2743200"/>
+            <a:ext cx="8046720" cy="393192"/>
+          </a:xfrm>
+          <a:prstGeom prst="roundRect">
+            <a:avLst/>
+          </a:prstGeom>
+          <a:solidFill>
+            <a:srgbClr val="E2ECFF"/>
+          </a:solidFill>
+          <a:ln>
+            <a:noFill/>
+          </a:ln>
+          <a:effectLst/>
+        </p:spPr>
+        <p:style>
+          <a:lnRef idx="1">
+            <a:schemeClr val="accent1"/>
+          </a:lnRef>
+          <a:fillRef idx="3">
+            <a:schemeClr val="accent1"/>
+          </a:fillRef>
+          <a:effectRef idx="2">
+            <a:schemeClr val="accent1"/>
+          </a:effectRef>
+          <a:fontRef idx="minor">
+            <a:schemeClr val="lt1"/>
+          </a:fontRef>
+        </p:style>
+        <p:txBody>
+          <a:bodyPr rtlCol="0" anchor="ctr"/>
+          <a:lstStyle/>
+          <a:p>
+            <a:pPr algn="ctr"/>
+          </a:p>
+        </p:txBody>
+      </p:sp>
+      <p:sp>
+        <p:nvSpPr>
+          <p:cNvPr id="22" name="TextBox 21"/>
+          <p:cNvSpPr txBox="1"/>
+          <p:nvPr/>
+        </p:nvSpPr>
+        <p:spPr>
+          <a:xfrm>
+            <a:off x="731520" y="2804160"/>
+            <a:ext cx="1554480" cy="274320"/>
+          </a:xfrm>
+          <a:prstGeom prst="rect">
+            <a:avLst/>
+          </a:prstGeom>
+          <a:noFill/>
+        </p:spPr>
+        <p:txBody>
+          <a:bodyPr wrap="square">
+            <a:spAutoFit/>
+          </a:bodyPr>
+          <a:lstStyle/>
+          <a:p>
+            <a:r>
+              <a:rPr sz="900" b="1">
+                <a:solidFill>
+                  <a:srgbClr val="13135E"/>
+                </a:solidFill>
+                <a:latin typeface="Arial"/>
+              </a:rPr>
+              <a:t>Node LTS ≥ 20.19 + npm</a:t>
+            </a:r>
+          </a:p>
+        </p:txBody>
+      </p:sp>
+      <p:sp>
+        <p:nvSpPr>
+          <p:cNvPr id="23" name="TextBox 22"/>
+          <p:cNvSpPr txBox="1"/>
+          <p:nvPr/>
+        </p:nvSpPr>
+        <p:spPr>
+          <a:xfrm>
+            <a:off x="2377440" y="2804160"/>
+            <a:ext cx="3016000" cy="274320"/>
+          </a:xfrm>
+          <a:prstGeom prst="rect">
+            <a:avLst/>
+          </a:prstGeom>
+          <a:noFill/>
+        </p:spPr>
+        <p:txBody>
+          <a:bodyPr wrap="square">
+            <a:spAutoFit/>
+          </a:bodyPr>
+          <a:lstStyle/>
+          <a:p>
+            <a:r>
+              <a:rPr sz="900" b="0">
+                <a:solidFill>
+                  <a:srgbClr val="434343"/>
+                </a:solidFill>
+                <a:latin typeface="Consolas"/>
+              </a:rPr>
+              <a:t>nvm install 20 &amp;&amp; nvm use</a:t>
+            </a:r>
+          </a:p>
+        </p:txBody>
+      </p:sp>
+      <p:sp>
+        <p:nvSpPr>
+          <p:cNvPr id="24" name="TextBox 23"/>
+          <p:cNvSpPr txBox="1"/>
+          <p:nvPr/>
+        </p:nvSpPr>
+        <p:spPr>
+          <a:xfrm>
+            <a:off x="5486400" y="2804160"/>
+            <a:ext cx="3016000" cy="274320"/>
+          </a:xfrm>
+          <a:prstGeom prst="rect">
+            <a:avLst/>
+          </a:prstGeom>
+          <a:noFill/>
+        </p:spPr>
+        <p:txBody>
+          <a:bodyPr wrap="square">
+            <a:spAutoFit/>
+          </a:bodyPr>
+          <a:lstStyle/>
+          <a:p>
+            <a:r>
+              <a:rPr sz="900" b="0">
+                <a:solidFill>
+                  <a:srgbClr val="434343"/>
+                </a:solidFill>
+                <a:latin typeface="Consolas"/>
+              </a:rPr>
+              <a:t>nvm install 20 &amp;&amp; nvm use 20</a:t>
+            </a:r>
+          </a:p>
+        </p:txBody>
+      </p:sp>
+      <p:sp>
+        <p:nvSpPr>
+          <p:cNvPr id="25" name="Rounded Rectangle 24"/>
+          <p:cNvSpPr/>
+          <p:nvPr/>
+        </p:nvSpPr>
+        <p:spPr>
+          <a:xfrm>
+            <a:off x="548640" y="3154680"/>
+            <a:ext cx="8046720" cy="393192"/>
+          </a:xfrm>
+          <a:prstGeom prst="roundRect">
+            <a:avLst/>
+          </a:prstGeom>
+          <a:solidFill>
+            <a:srgbClr val="FFFFFF"/>
+          </a:solidFill>
+          <a:ln w="15875">
+            <a:solidFill>
+              <a:srgbClr val="CCD9FF"/>
+            </a:solidFill>
+          </a:ln>
+          <a:effectLst/>
+        </p:spPr>
+        <p:style>
+          <a:lnRef idx="1">
+            <a:schemeClr val="accent1"/>
+          </a:lnRef>
+          <a:fillRef idx="3">
+            <a:schemeClr val="accent1"/>
+          </a:fillRef>
+          <a:effectRef idx="2">
+            <a:schemeClr val="accent1"/>
+          </a:effectRef>
+          <a:fontRef idx="minor">
+            <a:schemeClr val="lt1"/>
+          </a:fontRef>
+        </p:style>
+        <p:txBody>
+          <a:bodyPr rtlCol="0" anchor="ctr"/>
+          <a:lstStyle/>
+          <a:p>
+            <a:pPr algn="ctr"/>
+          </a:p>
+        </p:txBody>
+      </p:sp>
+      <p:sp>
+        <p:nvSpPr>
+          <p:cNvPr id="26" name="TextBox 25"/>
+          <p:cNvSpPr txBox="1"/>
+          <p:nvPr/>
+        </p:nvSpPr>
+        <p:spPr>
+          <a:xfrm>
+            <a:off x="731520" y="3215640"/>
+            <a:ext cx="1554480" cy="274320"/>
+          </a:xfrm>
+          <a:prstGeom prst="rect">
+            <a:avLst/>
+          </a:prstGeom>
+          <a:noFill/>
+        </p:spPr>
+        <p:txBody>
+          <a:bodyPr wrap="square">
+            <a:spAutoFit/>
+          </a:bodyPr>
+          <a:lstStyle/>
+          <a:p>
+            <a:r>
+              <a:rPr sz="900" b="1">
+                <a:solidFill>
+                  <a:srgbClr val="13135E"/>
+                </a:solidFill>
+                <a:latin typeface="Arial"/>
+              </a:rPr>
+              <a:t>GitHub CLI</a:t>
+            </a:r>
+          </a:p>
+        </p:txBody>
+      </p:sp>
+      <p:sp>
+        <p:nvSpPr>
+          <p:cNvPr id="27" name="TextBox 26"/>
+          <p:cNvSpPr txBox="1"/>
+          <p:nvPr/>
+        </p:nvSpPr>
+        <p:spPr>
+          <a:xfrm>
+            <a:off x="2377440" y="3215640"/>
+            <a:ext cx="3016000" cy="274320"/>
+          </a:xfrm>
+          <a:prstGeom prst="rect">
+            <a:avLst/>
+          </a:prstGeom>
+          <a:noFill/>
+        </p:spPr>
+        <p:txBody>
+          <a:bodyPr wrap="square">
+            <a:spAutoFit/>
+          </a:bodyPr>
+          <a:lstStyle/>
+          <a:p>
+            <a:r>
+              <a:rPr sz="900" b="0">
+                <a:solidFill>
+                  <a:srgbClr val="434343"/>
+                </a:solidFill>
+                <a:latin typeface="Consolas"/>
+              </a:rPr>
+              <a:t>brew install gh</a:t>
+            </a:r>
+            <a:r>
+              <a:rPr sz="900" b="0">
+                <a:solidFill>
+                  <a:srgbClr val="999999"/>
+                </a:solidFill>
+                <a:latin typeface="Arial"/>
+              </a:rPr>
+              <a:t>  → gh auth login</a:t>
+            </a:r>
+          </a:p>
+        </p:txBody>
+      </p:sp>
+      <p:sp>
+        <p:nvSpPr>
+          <p:cNvPr id="28" name="TextBox 27"/>
+          <p:cNvSpPr txBox="1"/>
+          <p:nvPr/>
+        </p:nvSpPr>
+        <p:spPr>
+          <a:xfrm>
+            <a:off x="5486400" y="3215640"/>
+            <a:ext cx="3016000" cy="274320"/>
+          </a:xfrm>
+          <a:prstGeom prst="rect">
+            <a:avLst/>
+          </a:prstGeom>
+          <a:noFill/>
+        </p:spPr>
+        <p:txBody>
+          <a:bodyPr wrap="square">
+            <a:spAutoFit/>
+          </a:bodyPr>
+          <a:lstStyle/>
+          <a:p>
+            <a:r>
+              <a:rPr sz="900" b="0">
+                <a:solidFill>
+                  <a:srgbClr val="434343"/>
+                </a:solidFill>
+                <a:latin typeface="Consolas"/>
+              </a:rPr>
+              <a:t>winget install GitHub.cli</a:t>
+            </a:r>
+            <a:r>
+              <a:rPr sz="900" b="0">
+                <a:solidFill>
+                  <a:srgbClr val="999999"/>
+                </a:solidFill>
+                <a:latin typeface="Arial"/>
+              </a:rPr>
+              <a:t>  → gh auth login</a:t>
+            </a:r>
+          </a:p>
+        </p:txBody>
+      </p:sp>
+      <p:sp>
+        <p:nvSpPr>
+          <p:cNvPr id="29" name="Rounded Rectangle 28"/>
+          <p:cNvSpPr/>
+          <p:nvPr/>
+        </p:nvSpPr>
+        <p:spPr>
+          <a:xfrm>
+            <a:off x="548640" y="3566160"/>
+            <a:ext cx="8046720" cy="393192"/>
+          </a:xfrm>
+          <a:prstGeom prst="roundRect">
+            <a:avLst/>
+          </a:prstGeom>
+          <a:solidFill>
+            <a:srgbClr val="E2ECFF"/>
+          </a:solidFill>
+          <a:ln>
+            <a:noFill/>
+          </a:ln>
+          <a:effectLst/>
+        </p:spPr>
+        <p:style>
+          <a:lnRef idx="1">
+            <a:schemeClr val="accent1"/>
+          </a:lnRef>
+          <a:fillRef idx="3">
+            <a:schemeClr val="accent1"/>
+          </a:fillRef>
+          <a:effectRef idx="2">
+            <a:schemeClr val="accent1"/>
+          </a:effectRef>
+          <a:fontRef idx="minor">
+            <a:schemeClr val="lt1"/>
+          </a:fontRef>
+        </p:style>
+        <p:txBody>
+          <a:bodyPr rtlCol="0" anchor="ctr"/>
+          <a:lstStyle/>
+          <a:p>
+            <a:pPr algn="ctr"/>
+          </a:p>
+        </p:txBody>
+      </p:sp>
+      <p:sp>
+        <p:nvSpPr>
+          <p:cNvPr id="30" name="TextBox 29"/>
+          <p:cNvSpPr txBox="1"/>
+          <p:nvPr/>
+        </p:nvSpPr>
+        <p:spPr>
+          <a:xfrm>
+            <a:off x="731520" y="3627120"/>
+            <a:ext cx="1554480" cy="274320"/>
+          </a:xfrm>
+          <a:prstGeom prst="rect">
+            <a:avLst/>
+          </a:prstGeom>
+          <a:noFill/>
+        </p:spPr>
+        <p:txBody>
+          <a:bodyPr wrap="square">
+            <a:spAutoFit/>
+          </a:bodyPr>
+          <a:lstStyle/>
+          <a:p>
+            <a:r>
+              <a:rPr sz="900" b="1">
+                <a:solidFill>
+                  <a:srgbClr val="13135E"/>
+                </a:solidFill>
+                <a:latin typeface="Arial"/>
+              </a:rPr>
+              <a:t>Claude Code</a:t>
+            </a:r>
+          </a:p>
+        </p:txBody>
+      </p:sp>
+      <p:sp>
+        <p:nvSpPr>
+          <p:cNvPr id="31" name="TextBox 30"/>
+          <p:cNvSpPr txBox="1"/>
+          <p:nvPr/>
+        </p:nvSpPr>
+        <p:spPr>
+          <a:xfrm>
+            <a:off x="2377440" y="3627120"/>
+            <a:ext cx="3016000" cy="274320"/>
+          </a:xfrm>
+          <a:prstGeom prst="rect">
+            <a:avLst/>
+          </a:prstGeom>
+          <a:noFill/>
+        </p:spPr>
+        <p:txBody>
+          <a:bodyPr wrap="square">
+            <a:spAutoFit/>
+          </a:bodyPr>
+          <a:lstStyle/>
+          <a:p>
+            <a:r>
+              <a:rPr sz="900" b="0">
+                <a:solidFill>
+                  <a:srgbClr val="434343"/>
+                </a:solidFill>
+                <a:latin typeface="Consolas"/>
+              </a:rPr>
+              <a:t>curl -fsSL https://claude.ai/install.sh | bash</a:t>
+            </a:r>
+          </a:p>
+        </p:txBody>
+      </p:sp>
+      <p:sp>
+        <p:nvSpPr>
+          <p:cNvPr id="32" name="TextBox 31"/>
+          <p:cNvSpPr txBox="1"/>
+          <p:nvPr/>
+        </p:nvSpPr>
+        <p:spPr>
+          <a:xfrm>
+            <a:off x="5486400" y="3627120"/>
+            <a:ext cx="3016000" cy="274320"/>
+          </a:xfrm>
+          <a:prstGeom prst="rect">
+            <a:avLst/>
+          </a:prstGeom>
+          <a:noFill/>
+        </p:spPr>
+        <p:txBody>
+          <a:bodyPr wrap="square">
+            <a:spAutoFit/>
+          </a:bodyPr>
+          <a:lstStyle/>
+          <a:p>
+            <a:r>
+              <a:rPr sz="900" b="0">
+                <a:solidFill>
+                  <a:srgbClr val="434343"/>
+                </a:solidFill>
+                <a:latin typeface="Consolas"/>
+              </a:rPr>
+              <a:t>irm https://claude.ai/install.ps1 | iex</a:t>
+            </a:r>
+          </a:p>
+        </p:txBody>
+      </p:sp>
+      <p:sp>
+        <p:nvSpPr>
+          <p:cNvPr id="33" name="Rounded Rectangle 32"/>
+          <p:cNvSpPr/>
+          <p:nvPr/>
+        </p:nvSpPr>
+        <p:spPr>
+          <a:xfrm>
+            <a:off x="548640" y="3977640"/>
+            <a:ext cx="8046720" cy="393192"/>
+          </a:xfrm>
+          <a:prstGeom prst="roundRect">
+            <a:avLst/>
+          </a:prstGeom>
+          <a:solidFill>
+            <a:srgbClr val="FFFFFF"/>
+          </a:solidFill>
+          <a:ln w="15875">
+            <a:solidFill>
+              <a:srgbClr val="CCD9FF"/>
+            </a:solidFill>
+          </a:ln>
+          <a:effectLst/>
+        </p:spPr>
+        <p:style>
+          <a:lnRef idx="1">
+            <a:schemeClr val="accent1"/>
+          </a:lnRef>
+          <a:fillRef idx="3">
+            <a:schemeClr val="accent1"/>
+          </a:fillRef>
+          <a:effectRef idx="2">
+            <a:schemeClr val="accent1"/>
+          </a:effectRef>
+          <a:fontRef idx="minor">
+            <a:schemeClr val="lt1"/>
+          </a:fontRef>
+        </p:style>
+        <p:txBody>
+          <a:bodyPr rtlCol="0" anchor="ctr"/>
+          <a:lstStyle/>
+          <a:p>
+            <a:pPr algn="ctr"/>
+          </a:p>
+        </p:txBody>
+      </p:sp>
+      <p:sp>
+        <p:nvSpPr>
+          <p:cNvPr id="34" name="TextBox 33"/>
+          <p:cNvSpPr txBox="1"/>
+          <p:nvPr/>
+        </p:nvSpPr>
+        <p:spPr>
+          <a:xfrm>
+            <a:off x="731520" y="4038600"/>
+            <a:ext cx="1554480" cy="274320"/>
+          </a:xfrm>
+          <a:prstGeom prst="rect">
+            <a:avLst/>
+          </a:prstGeom>
+          <a:noFill/>
+        </p:spPr>
+        <p:txBody>
+          <a:bodyPr wrap="square">
+            <a:spAutoFit/>
+          </a:bodyPr>
+          <a:lstStyle/>
+          <a:p>
+            <a:r>
+              <a:rPr sz="900" b="1">
+                <a:solidFill>
+                  <a:srgbClr val="13135E"/>
+                </a:solidFill>
+                <a:latin typeface="Arial"/>
+              </a:rPr>
+              <a:t>VS Code (or your editor)</a:t>
+            </a:r>
+          </a:p>
+        </p:txBody>
+      </p:sp>
+      <p:sp>
+        <p:nvSpPr>
+          <p:cNvPr id="35" name="TextBox 34"/>
+          <p:cNvSpPr txBox="1"/>
+          <p:nvPr/>
+        </p:nvSpPr>
+        <p:spPr>
+          <a:xfrm>
+            <a:off x="2377440" y="4038600"/>
+            <a:ext cx="3016000" cy="274320"/>
+          </a:xfrm>
+          <a:prstGeom prst="rect">
+            <a:avLst/>
+          </a:prstGeom>
+          <a:noFill/>
+        </p:spPr>
+        <p:txBody>
+          <a:bodyPr wrap="square">
+            <a:spAutoFit/>
+          </a:bodyPr>
+          <a:lstStyle/>
+          <a:p>
+            <a:r>
+              <a:rPr sz="900" b="0">
+                <a:solidFill>
+                  <a:srgbClr val="434343"/>
+                </a:solidFill>
+                <a:latin typeface="Consolas"/>
+              </a:rPr>
+              <a:t>brew install --cask visual-studio-code</a:t>
+            </a:r>
+          </a:p>
+        </p:txBody>
+      </p:sp>
+      <p:sp>
+        <p:nvSpPr>
+          <p:cNvPr id="36" name="TextBox 35"/>
+          <p:cNvSpPr txBox="1"/>
+          <p:nvPr/>
+        </p:nvSpPr>
+        <p:spPr>
+          <a:xfrm>
+            <a:off x="5486400" y="4038600"/>
+            <a:ext cx="3016000" cy="274320"/>
+          </a:xfrm>
+          <a:prstGeom prst="rect">
+            <a:avLst/>
+          </a:prstGeom>
+          <a:noFill/>
+        </p:spPr>
+        <p:txBody>
+          <a:bodyPr wrap="square">
+            <a:spAutoFit/>
+          </a:bodyPr>
+          <a:lstStyle/>
+          <a:p>
+            <a:r>
+              <a:rPr sz="900" b="0">
+                <a:solidFill>
+                  <a:srgbClr val="434343"/>
+                </a:solidFill>
+                <a:latin typeface="Consolas"/>
+              </a:rPr>
+              <a:t>winget install Microsoft.VisualStudioCode</a:t>
+            </a:r>
+          </a:p>
+        </p:txBody>
+      </p:sp>
+      <p:sp>
+        <p:nvSpPr>
+          <p:cNvPr id="37" name="Rounded Rectangle 36"/>
+          <p:cNvSpPr/>
+          <p:nvPr/>
+        </p:nvSpPr>
+        <p:spPr>
+          <a:xfrm>
+            <a:off x="548640" y="4404360"/>
+            <a:ext cx="8046720" cy="396240"/>
+          </a:xfrm>
+          <a:prstGeom prst="roundRect">
+            <a:avLst/>
+          </a:prstGeom>
+          <a:solidFill>
+            <a:srgbClr val="E2ECFF"/>
+          </a:solidFill>
+          <a:ln>
+            <a:noFill/>
+          </a:ln>
+          <a:effectLst/>
+        </p:spPr>
+        <p:style>
+          <a:lnRef idx="1">
+            <a:schemeClr val="accent1"/>
+          </a:lnRef>
+          <a:fillRef idx="3">
+            <a:schemeClr val="accent1"/>
+          </a:fillRef>
+          <a:effectRef idx="2">
+            <a:schemeClr val="accent1"/>
+          </a:effectRef>
+          <a:fontRef idx="minor">
+            <a:schemeClr val="lt1"/>
+          </a:fontRef>
+        </p:style>
+        <p:txBody>
+          <a:bodyPr rtlCol="0" anchor="ctr"/>
+          <a:lstStyle/>
+          <a:p>
+            <a:pPr algn="ctr"/>
+          </a:p>
+        </p:txBody>
+      </p:sp>
+      <p:sp>
+        <p:nvSpPr>
+          <p:cNvPr id="38" name="Rectangle 37"/>
+          <p:cNvSpPr/>
+          <p:nvPr/>
+        </p:nvSpPr>
+        <p:spPr>
+          <a:xfrm>
+            <a:off x="548640" y="4404360"/>
+            <a:ext cx="64008" cy="396240"/>
+          </a:xfrm>
+          <a:prstGeom prst="rect">
+            <a:avLst/>
+          </a:prstGeom>
+          <a:solidFill>
+            <a:srgbClr val="403FE8"/>
+          </a:solidFill>
+          <a:ln>
+            <a:noFill/>
+          </a:ln>
+          <a:effectLst/>
+        </p:spPr>
+        <p:style>
+          <a:lnRef idx="1">
+            <a:schemeClr val="accent1"/>
+          </a:lnRef>
+          <a:fillRef idx="3">
+            <a:schemeClr val="accent1"/>
+          </a:fillRef>
+          <a:effectRef idx="2">
+            <a:schemeClr val="accent1"/>
+          </a:effectRef>
+          <a:fontRef idx="minor">
+            <a:schemeClr val="lt1"/>
+          </a:fontRef>
+        </p:style>
+        <p:txBody>
+          <a:bodyPr rtlCol="0" anchor="ctr"/>
+          <a:lstStyle/>
+          <a:p>
+            <a:pPr algn="ctr"/>
+          </a:p>
+        </p:txBody>
+      </p:sp>
+      <p:sp>
+        <p:nvSpPr>
+          <p:cNvPr id="39" name="TextBox 38"/>
+          <p:cNvSpPr txBox="1"/>
+          <p:nvPr/>
+        </p:nvSpPr>
+        <p:spPr>
+          <a:xfrm>
+            <a:off x="731520" y="4442460"/>
+            <a:ext cx="7772400" cy="320040"/>
+          </a:xfrm>
+          <a:prstGeom prst="rect">
+            <a:avLst/>
+          </a:prstGeom>
+          <a:noFill/>
+        </p:spPr>
+        <p:txBody>
+          <a:bodyPr wrap="square">
+            <a:spAutoFit/>
+          </a:bodyPr>
+          <a:lstStyle/>
+          <a:p>
+            <a:r>
+              <a:rPr sz="850" b="1">
+                <a:solidFill>
+                  <a:srgbClr val="403FE8"/>
+                </a:solidFill>
+                <a:latin typeface="Arial"/>
+              </a:rPr>
+              <a:t>ACCOUNTS   </a:t>
+            </a:r>
+            <a:r>
+              <a:rPr sz="850" b="0">
+                <a:solidFill>
+                  <a:srgbClr val="434343"/>
+                </a:solidFill>
+                <a:latin typeface="Arial"/>
+              </a:rPr>
+              <a:t>GitHub account + Claude Code seat (EDS-provisioned) — confirm both logins before lab day.</a:t>
+            </a:r>
+          </a:p>
+          <a:p>
+            <a:r>
+              <a:rPr sz="850" b="1">
+                <a:solidFill>
+                  <a:srgbClr val="403FE8"/>
+                </a:solidFill>
+                <a:latin typeface="Arial"/>
+              </a:rPr>
+              <a:t>VERIFY   </a:t>
+            </a:r>
+            <a:r>
+              <a:rPr sz="850" b="0">
+                <a:solidFill>
+                  <a:srgbClr val="434343"/>
+                </a:solidFill>
+                <a:latin typeface="Consolas"/>
+              </a:rPr>
+              <a:t>git --version · node --version (≥ 20.19) · gh auth status · claude --version</a:t>
+            </a:r>
+          </a:p>
+        </p:txBody>
+      </p:sp>
+    </p:spTree>
+  </p:cSld>
+  <p:clrMapOvr>
+    <a:masterClrMapping/>
+  </p:clrMapOvr>
+</p:sld>
+</file>
+
 <file path=ppt/slides/slide3.xml><?xml version="1.0" encoding="utf-8"?>
 <p:sld xmlns:a="http://schemas.openxmlformats.org/drawingml/2006/main" xmlns:p="http://schemas.openxmlformats.org/presentationml/2006/main" xmlns:r="http://schemas.openxmlformats.org/officeDocument/2006/relationships">
   <p:cSld>
@@ -17204,7 +18747,7 @@
                 </a:solidFill>
                 <a:latin typeface="Arial"/>
               </a:rPr>
-              <a:t>Clone it, then from the repo root seed the backlog:  ./scripts/setup-repo.sh  (Windows: .\scripts\setup-repo.ps1). Creates the lab labels + issues — needs gh auth login.</a:t>
+              <a:t>Clone it, then from the repo root seed the backlog:  ./scripts/setup-repo.sh  (Windows: .\scripts\setup-repo.ps1). Creates the lab labels + issues — gh login done on the previous slide.</a:t>
             </a:r>
           </a:p>
           <a:p>
@@ -17232,7 +18775,7 @@
                 </a:solidFill>
                 <a:latin typeface="Arial"/>
               </a:rPr>
-              <a:t>Install &amp; run:  npm install · npm run reset-db · npm run dev  (client :5173, API :3001). Node 20+.</a:t>
+              <a:t>Install &amp; run:  npm install · npm run reset-db · npm run dev  (client :5173, API :3001). Node LTS ≥ 20.19 — nvm use reads .nvmrc.</a:t>
             </a:r>
           </a:p>
           <a:p>

--- a/docs/instructor/lab-1b-bugfix-test-driven.pptx
+++ b/docs/instructor/lab-1b-bugfix-test-driven.pptx
@@ -1646,7 +1646,7 @@
           <a:lstStyle/>
           <a:p>
             <a:r>
-              <a:t>Land the takeaway (~5 min): the LOOP is the transferable skill, not any one bug. Walk the ship checklist. Point everyone to the #extra-duty-solutions-ai-training Slack channel to ask questions and share their PRs.</a:t>
+              <a:t>Land the takeaway (~5 min): the LOOP is the transferable skill, not any one bug. Walk the ship checklist. Point everyone to the team's AI-training Slack channel to ask questions and share their PRs.</a:t>
             </a:r>
           </a:p>
         </p:txBody>
@@ -1716,7 +1716,7 @@
           <a:lstStyle/>
           <a:p>
             <a:r>
-              <a:t>One-time install, ideally before lab day (~10 min). macOS column assumes Homebrew, Windows assumes winget (built into Win 10/11) — fallback for both is each tool’s download page. Why each tool: git drives the branch/PR flow; nvm makes `nvm use` match the repo’s .nvmrc; Node floor is LTS 20.19+ because Vite 7 requires it — 20, 22, or 24 LTS all work, odd majors (23) print engine warnings that confuse people; GitHub CLI powers the issue-seeding script and PR flow (`gh auth login` is the step people forget); Claude Code uses the native installer — self-updating and avoids npm -g permission problems on locked-down machines; any editor is fine, the demo narrates from VS Code. Accounts: a GitHub account plus an EDS-provisioned Claude Code seat — have everyone run the VERIFY line and complete a Claude login BEFORE lab day; pair anyone broken at the door rather than during the demo.</a:t>
+              <a:t>One-time install, ideally before lab day (~10 min). macOS column assumes Homebrew, Windows assumes winget (built into Win 10/11) — fallback for both is each tool’s download page. Why each tool: git drives the branch/PR flow; nvm makes `nvm use` match the repo’s .nvmrc; Node floor is LTS 20.19+ because Vite 7 requires it — 20, 22, or 24 LTS all work, odd majors (23) print engine warnings that confuse people; GitHub CLI powers the issue-seeding script and PR flow (`gh auth login` is the step people forget); Claude Code uses the native installer — self-updating and avoids npm -g permission problems on locked-down machines; any editor is fine, the demo narrates from VS Code. Accounts: a GitHub account plus a company-provisioned Claude Code seat — have everyone run the VERIFY line and complete a Claude login BEFORE lab day; pair anyone broken at the door rather than during the demo.</a:t>
             </a:r>
           </a:p>
         </p:txBody>
@@ -16903,7 +16903,7 @@
                 </a:solidFill>
                 <a:latin typeface="Arial"/>
               </a:rPr>
-              <a:t>Questions &amp; support: #extra-duty-solutions-ai-training on Slack — or ask your instructor.</a:t>
+              <a:t>Questions &amp; support: your team's AI-training channel on Slack — or ask your instructor.</a:t>
             </a:r>
           </a:p>
         </p:txBody>
@@ -18355,7 +18355,7 @@
                 </a:solidFill>
                 <a:latin typeface="Arial"/>
               </a:rPr>
-              <a:t>GitHub account + Claude Code seat (EDS-provisioned) — confirm both logins before lab day.</a:t>
+              <a:t>GitHub account + Claude Code seat (company-provisioned) — confirm both logins before lab day.</a:t>
             </a:r>
           </a:p>
           <a:p>
